--- a/output/porto_defence_he.pptx
+++ b/output/porto_defence_he.pptx
@@ -241,19 +241,19 @@
                 <c:formatCode>General</c:formatCode>
                 <c:ptCount val="6"/>
                 <c:pt idx="0">
-                  <c:v>1404</c:v>
+                  <c:v>1380</c:v>
                 </c:pt>
                 <c:pt idx="1">
-                  <c:v>290</c:v>
+                  <c:v>304</c:v>
                 </c:pt>
                 <c:pt idx="2">
-                  <c:v>103</c:v>
+                  <c:v>106</c:v>
                 </c:pt>
                 <c:pt idx="3">
-                  <c:v>20</c:v>
+                  <c:v>25</c:v>
                 </c:pt>
                 <c:pt idx="4">
-                  <c:v>8</c:v>
+                  <c:v>9</c:v>
                 </c:pt>
                 <c:pt idx="5">
                   <c:v>1</c:v>
@@ -342,7 +342,7 @@
                 <c:formatCode>General</c:formatCode>
                 <c:ptCount val="6"/>
                 <c:pt idx="0">
-                  <c:v>347</c:v>
+                  <c:v>339</c:v>
                 </c:pt>
                 <c:pt idx="1">
                   <c:v>0</c:v>
@@ -2685,7 +2685,7 @@
                 <a:ea typeface="Arial" pitchFamily="34" charset="-122"/>
                 <a:cs typeface="Arial" pitchFamily="34" charset="-120"/>
               </a:rPr>
-              <a:t>1,602,542</a:t>
+              <a:t>1,616,575</a:t>
             </a:r>
             <a:endParaRPr lang="en-US" sz="2600" dirty="0"/>
           </a:p>
@@ -2763,7 +2763,7 @@
                 <a:ea typeface="Arial" pitchFamily="34" charset="-122"/>
                 <a:cs typeface="Arial" pitchFamily="34" charset="-120"/>
               </a:rPr>
-              <a:t>22,273,314</a:t>
+              <a:t>23,354,267</a:t>
             </a:r>
             <a:endParaRPr lang="en-US" sz="2600" dirty="0"/>
           </a:p>
@@ -2841,7 +2841,7 @@
                 <a:ea typeface="Arial" pitchFamily="34" charset="-122"/>
                 <a:cs typeface="Arial" pitchFamily="34" charset="-120"/>
               </a:rPr>
-              <a:t>1,404</a:t>
+              <a:t>1,380</a:t>
             </a:r>
             <a:endParaRPr lang="en-US" sz="2600" dirty="0"/>
           </a:p>
@@ -3444,7 +3444,7 @@
                 <a:ea typeface="Arial" pitchFamily="34" charset="-122"/>
                 <a:cs typeface="Arial" pitchFamily="34" charset="-120"/>
               </a:rPr>
-              <a:t>למה הוא ריק — והוכחה, לא הסבר</a:t>
+              <a:t>קיימים — אבל לא פופולריים</a:t>
             </a:r>
             <a:endParaRPr lang="en-US" sz="3400" dirty="0"/>
           </a:p>
@@ -3528,7 +3528,7 @@
                 <a:ea typeface="Arial" pitchFamily="34" charset="-122"/>
                 <a:cs typeface="Arial" pitchFamily="34" charset="-120"/>
               </a:rPr>
-              <a:t>17,437 נסיעות כאלה קטן מספיק לבדיקה ממצה — הכל מול הכל, בסף של שתי נסיעות. זו הרצפה: אין "משותף" מתחת לשניים.</a:t>
+              <a:t>25,223 נסיעות כאלה קטן מספיק לבדיקה ממצה — הכל מול הכל, בסף של שתי נסיעות. זו הרצפה: אין "משותף" מתחת לשניים. והתשובה שונה בין שני הספים.</a:t>
             </a:r>
             <a:endParaRPr lang="en-US" sz="1600" dirty="0"/>
           </a:p>
@@ -3594,7 +3594,7 @@
                 <a:ea typeface="Arial" pitchFamily="34" charset="-122"/>
                 <a:cs typeface="Arial" pitchFamily="34" charset="-120"/>
               </a:rPr>
-              <a:t>26.25</a:t>
+              <a:t>26.93</a:t>
             </a:r>
             <a:endParaRPr lang="en-US" sz="3200" dirty="0"/>
           </a:p>
@@ -3699,7 +3699,7 @@
                 <a:ea typeface="Arial" pitchFamily="34" charset="-122"/>
                 <a:cs typeface="Arial" pitchFamily="34" charset="-120"/>
               </a:rPr>
-              <a:t>108</a:t>
+              <a:t>125</a:t>
             </a:r>
             <a:endParaRPr lang="en-US" sz="3200" dirty="0"/>
           </a:p>
@@ -3738,7 +3738,7 @@
                 <a:ea typeface="Arial" pitchFamily="34" charset="-122"/>
                 <a:cs typeface="Arial" pitchFamily="34" charset="-120"/>
               </a:rPr>
-              <a:t>מועמדים מעל 20 ק"מ</a:t>
+              <a:t>מסלולים תקינים מעל 20 ק"מ — קיימים</a:t>
             </a:r>
             <a:endParaRPr lang="en-US" sz="1150" dirty="0"/>
           </a:p>
@@ -3804,7 +3804,7 @@
                 <a:ea typeface="Arial" pitchFamily="34" charset="-122"/>
                 <a:cs typeface="Arial" pitchFamily="34" charset="-120"/>
               </a:rPr>
-              <a:t>0</a:t>
+              <a:t>3</a:t>
             </a:r>
             <a:endParaRPr lang="en-US" sz="3200" dirty="0"/>
           </a:p>
@@ -3843,7 +3843,7 @@
                 <a:ea typeface="Arial" pitchFamily="34" charset="-122"/>
                 <a:cs typeface="Arial" pitchFamily="34" charset="-120"/>
               </a:rPr>
-              <a:t>מהם מסלול תקין</a:t>
+              <a:t>נסיעות תומכות בטוב שבהם — הרצפה 33</a:t>
             </a:r>
             <a:endParaRPr lang="en-US" sz="1150" dirty="0"/>
           </a:p>
@@ -3909,7 +3909,7 @@
                 <a:ea typeface="Arial" pitchFamily="34" charset="-122"/>
                 <a:cs typeface="Arial" pitchFamily="34" charset="-120"/>
               </a:rPr>
-              <a:t>19.91</a:t>
+              <a:t>0</a:t>
             </a:r>
             <a:endParaRPr lang="en-US" sz="3200" dirty="0"/>
           </a:p>
@@ -3948,7 +3948,7 @@
                 <a:ea typeface="Arial" pitchFamily="34" charset="-122"/>
                 <a:cs typeface="Arial" pitchFamily="34" charset="-120"/>
               </a:rPr>
-              <a:t>ק"מ — המסלול האמיתי הארוך ביותר</a:t>
+              <a:t>מועמדים מעל 40 ק"מ, בכל סף שהוא</a:t>
             </a:r>
             <a:endParaRPr lang="en-US" sz="1150" dirty="0"/>
           </a:p>
@@ -4166,7 +4166,7 @@
                 <a:ea typeface="Arial" pitchFamily="34" charset="-122"/>
                 <a:cs typeface="Arial" pitchFamily="34" charset="-120"/>
               </a:rPr>
-              <a:t>73</a:t>
+              <a:t>80</a:t>
             </a:r>
             <a:endParaRPr lang="en-US" sz="2700" dirty="0"/>
           </a:p>
@@ -4393,7 +4393,7 @@
                 <a:ea typeface="Arial" pitchFamily="34" charset="-122"/>
                 <a:cs typeface="Arial" pitchFamily="34" charset="-120"/>
               </a:rPr>
-              <a:t>29.5</a:t>
+              <a:t>34.2</a:t>
             </a:r>
             <a:endParaRPr lang="en-US" sz="2700" dirty="0"/>
           </a:p>
@@ -4688,7 +4688,7 @@
                 <a:ea typeface="Arial" pitchFamily="34" charset="-122"/>
                 <a:cs typeface="Arial" pitchFamily="34" charset="-120"/>
               </a:rPr>
-              <a:t>22,273,314</a:t>
+              <a:t>23,354,267</a:t>
             </a:r>
             <a:endParaRPr lang="en-US" sz="1300" dirty="0"/>
           </a:p>
@@ -4766,7 +4766,7 @@
                 <a:ea typeface="Arial" pitchFamily="34" charset="-122"/>
                 <a:cs typeface="Arial" pitchFamily="34" charset="-120"/>
               </a:rPr>
-              <a:t>4,168,171</a:t>
+              <a:t>4,496,659</a:t>
             </a:r>
             <a:endParaRPr lang="en-US" sz="1300" dirty="0"/>
           </a:p>
@@ -4844,7 +4844,7 @@
                 <a:ea typeface="Arial" pitchFamily="34" charset="-122"/>
                 <a:cs typeface="Arial" pitchFamily="34" charset="-120"/>
               </a:rPr>
-              <a:t>33,345,368</a:t>
+              <a:t>35,973,272</a:t>
             </a:r>
             <a:endParaRPr lang="en-US" sz="1300" dirty="0"/>
           </a:p>
@@ -4922,7 +4922,7 @@
                 <a:ea typeface="Arial" pitchFamily="34" charset="-122"/>
                 <a:cs typeface="Arial" pitchFamily="34" charset="-120"/>
               </a:rPr>
-              <a:t>20,736,196</a:t>
+              <a:t>21,805,095</a:t>
             </a:r>
             <a:endParaRPr lang="en-US" sz="1300" dirty="0"/>
           </a:p>
@@ -5000,7 +5000,7 @@
                 <a:ea typeface="Arial" pitchFamily="34" charset="-122"/>
                 <a:cs typeface="Arial" pitchFamily="34" charset="-120"/>
               </a:rPr>
-              <a:t>172,866</a:t>
+              <a:t>176,678</a:t>
             </a:r>
             <a:endParaRPr lang="en-US" sz="1300" dirty="0"/>
           </a:p>
@@ -6085,7 +6085,7 @@
                 <a:ea typeface="Arial" pitchFamily="34" charset="-122"/>
                 <a:cs typeface="Arial" pitchFamily="34" charset="-120"/>
               </a:rPr>
-              <a:t>99.89% מהעבודה נחסכת לפני שדבר עובר ברשת, והטעות חד-צדדית — היא עולה זמן, לא נכונות.</a:t>
+              <a:t>99.87% מהעבודה נחסכת לפני שדבר עובר ברשת, והטעות חד-צדדית — היא עולה זמן, לא נכונות.</a:t>
             </a:r>
             <a:endParaRPr lang="en-US" sz="1400" dirty="0"/>
           </a:p>
@@ -6230,7 +6230,7 @@
                 <a:ea typeface="Arial" pitchFamily="34" charset="-122"/>
                 <a:cs typeface="Arial" pitchFamily="34" charset="-120"/>
               </a:rPr>
-              <a:t>שיטת ה-LSH הפריזה ב-168.4%. בלי מעבר אימות זה היה מגיע לדוח.</a:t>
+              <a:t>שיטת ה-LSH הפריזה ב-172.68%. בלי מעבר אימות זה היה מגיע לדוח.</a:t>
             </a:r>
             <a:endParaRPr lang="en-US" sz="1400" dirty="0"/>
           </a:p>
@@ -7235,7 +7235,7 @@
                 <a:ea typeface="Arial" pitchFamily="34" charset="-122"/>
                 <a:cs typeface="Arial" pitchFamily="34" charset="-120"/>
               </a:rPr>
-              <a:t>1,710,670 ← 1,602,542</a:t>
+              <a:t>1,710,670 ← 1,616,575</a:t>
             </a:r>
             <a:endParaRPr lang="en-US" sz="1400" dirty="0"/>
           </a:p>
@@ -7402,7 +7402,7 @@
                 <a:ea typeface="Arial" pitchFamily="34" charset="-122"/>
                 <a:cs typeface="Arial" pitchFamily="34" charset="-120"/>
               </a:rPr>
-              <a:t>3,151 תאים ייחודיים</a:t>
+              <a:t>20,592 תאים ייחודיים</a:t>
             </a:r>
             <a:endParaRPr lang="en-US" sz="1400" dirty="0"/>
           </a:p>
@@ -7569,7 +7569,7 @@
                 <a:ea typeface="Arial" pitchFamily="34" charset="-122"/>
                 <a:cs typeface="Arial" pitchFamily="34" charset="-120"/>
               </a:rPr>
-              <a:t>1,404 מסלולים</a:t>
+              <a:t>1,380 מסלולים</a:t>
             </a:r>
             <a:endParaRPr lang="en-US" sz="1400" dirty="0"/>
           </a:p>
@@ -7628,7 +7628,7 @@
                 <a:ea typeface="Arial" pitchFamily="34" charset="-122"/>
                 <a:cs typeface="Arial" pitchFamily="34" charset="-120"/>
               </a:rPr>
-              <a:t>זמן ריצה מלא על האשכול: 73 דקות  ·  1 master + 5 workers  ·  כל שלב כותב ל-gs:// ושורד את מחיקת האשכול</a:t>
+              <a:t>זמן ריצה מלא על האשכול: 80 דקות  ·  1 master + 5 workers  ·  כל שלב כותב ל-gs:// ושורד את מחיקת האשכול</a:t>
             </a:r>
             <a:endParaRPr lang="en-US" sz="1400" dirty="0"/>
           </a:p>
@@ -7991,7 +7991,7 @@
                           <a:ea typeface="Arial" pitchFamily="34" charset="-122"/>
                           <a:cs typeface="Arial" pitchFamily="34" charset="-120"/>
                         </a:rPr>
-                        <a:t>36,483</a:t>
+                        <a:t>38,092</a:t>
                       </a:r>
                       <a:endParaRPr lang="en-US" sz="1300" dirty="0">
                         <a:latin typeface="Arial" charset="0"/>
@@ -8255,139 +8255,7 @@
                           <a:ea typeface="Arial" pitchFamily="34" charset="-122"/>
                           <a:cs typeface="Arial" pitchFamily="34" charset="-120"/>
                         </a:rPr>
-                        <a:t>18,201</a:t>
-                      </a:r>
-                      <a:endParaRPr lang="en-US" sz="1300" dirty="0">
-                        <a:latin typeface="Arial" charset="0"/>
-                        <a:ea typeface="Arial" charset="0"/>
-                        <a:cs typeface="Arial" charset="0"/>
-                      </a:endParaRPr>
-                    </a:p>
-                  </a:txBody>
-                  <a:tcPr marL="91440" marR="91440" marT="45720" marB="45720">
-                    <a:lnL w="6350" cap="flat" cmpd="sng" algn="ctr">
-                      <a:solidFill>
-                        <a:srgbClr val="DCE3EC"/>
-                      </a:solidFill>
-                      <a:prstDash val="solid"/>
-                      <a:round/>
-                      <a:headEnd type="none" w="med" len="med"/>
-                      <a:tailEnd type="none" w="med" len="med"/>
-                    </a:lnL>
-                    <a:lnR w="6350" cap="flat" cmpd="sng" algn="ctr">
-                      <a:solidFill>
-                        <a:srgbClr val="DCE3EC"/>
-                      </a:solidFill>
-                      <a:prstDash val="solid"/>
-                      <a:round/>
-                      <a:headEnd type="none" w="med" len="med"/>
-                      <a:tailEnd type="none" w="med" len="med"/>
-                    </a:lnR>
-                    <a:lnT w="6350" cap="flat" cmpd="sng" algn="ctr">
-                      <a:solidFill>
-                        <a:srgbClr val="DCE3EC"/>
-                      </a:solidFill>
-                      <a:prstDash val="solid"/>
-                      <a:round/>
-                      <a:headEnd type="none" w="med" len="med"/>
-                      <a:tailEnd type="none" w="med" len="med"/>
-                    </a:lnT>
-                    <a:lnB w="6350" cap="flat" cmpd="sng" algn="ctr">
-                      <a:solidFill>
-                        <a:srgbClr val="DCE3EC"/>
-                      </a:solidFill>
-                      <a:prstDash val="solid"/>
-                      <a:round/>
-                      <a:headEnd type="none" w="med" len="med"/>
-                      <a:tailEnd type="none" w="med" len="med"/>
-                    </a:lnB>
-                  </a:tcPr>
-                </a:tc>
-              </a:tr>
-              <a:tr h="512064">
-                <a:tc>
-                  <a:txBody>
-                    <a:bodyPr/>
-                    <a:lstStyle/>
-                    <a:p>
-                      <a:pPr algn="r" indent="0" marL="0">
-                        <a:buNone/>
-                      </a:pPr>
-                      <a:r>
-                        <a:rPr lang="en-US" sz="1300" dirty="0">
-                          <a:solidFill>
-                            <a:srgbClr val="16212E"/>
-                          </a:solidFill>
-                          <a:latin typeface="Arial" pitchFamily="34" charset="0"/>
-                          <a:ea typeface="Arial" pitchFamily="34" charset="-122"/>
-                          <a:cs typeface="Arial" pitchFamily="34" charset="-120"/>
-                        </a:rPr>
-                        <a:t>נקודת GPS מחוץ לתיבת הגבול של פורטו</a:t>
-                      </a:r>
-                      <a:endParaRPr lang="en-US" sz="1300" dirty="0">
-                        <a:latin typeface="Arial" charset="0"/>
-                        <a:ea typeface="Arial" charset="0"/>
-                        <a:cs typeface="Arial" charset="0"/>
-                      </a:endParaRPr>
-                    </a:p>
-                  </a:txBody>
-                  <a:tcPr marL="91440" marR="91440" marT="45720" marB="45720">
-                    <a:lnL w="6350" cap="flat" cmpd="sng" algn="ctr">
-                      <a:solidFill>
-                        <a:srgbClr val="DCE3EC"/>
-                      </a:solidFill>
-                      <a:prstDash val="solid"/>
-                      <a:round/>
-                      <a:headEnd type="none" w="med" len="med"/>
-                      <a:tailEnd type="none" w="med" len="med"/>
-                    </a:lnL>
-                    <a:lnR w="6350" cap="flat" cmpd="sng" algn="ctr">
-                      <a:solidFill>
-                        <a:srgbClr val="DCE3EC"/>
-                      </a:solidFill>
-                      <a:prstDash val="solid"/>
-                      <a:round/>
-                      <a:headEnd type="none" w="med" len="med"/>
-                      <a:tailEnd type="none" w="med" len="med"/>
-                    </a:lnR>
-                    <a:lnT w="6350" cap="flat" cmpd="sng" algn="ctr">
-                      <a:solidFill>
-                        <a:srgbClr val="DCE3EC"/>
-                      </a:solidFill>
-                      <a:prstDash val="solid"/>
-                      <a:round/>
-                      <a:headEnd type="none" w="med" len="med"/>
-                      <a:tailEnd type="none" w="med" len="med"/>
-                    </a:lnT>
-                    <a:lnB w="6350" cap="flat" cmpd="sng" algn="ctr">
-                      <a:solidFill>
-                        <a:srgbClr val="DCE3EC"/>
-                      </a:solidFill>
-                      <a:prstDash val="solid"/>
-                      <a:round/>
-                      <a:headEnd type="none" w="med" len="med"/>
-                      <a:tailEnd type="none" w="med" len="med"/>
-                    </a:lnB>
-                  </a:tcPr>
-                </a:tc>
-                <a:tc>
-                  <a:txBody>
-                    <a:bodyPr/>
-                    <a:lstStyle/>
-                    <a:p>
-                      <a:pPr algn="ctr" indent="0" marL="0">
-                        <a:buNone/>
-                      </a:pPr>
-                      <a:r>
-                        <a:rPr lang="en-US" sz="1300" b="1" dirty="0">
-                          <a:solidFill>
-                            <a:srgbClr val="1C4E80"/>
-                          </a:solidFill>
-                          <a:latin typeface="Arial" pitchFamily="34" charset="0"/>
-                          <a:ea typeface="Arial" pitchFamily="34" charset="-122"/>
-                          <a:cs typeface="Arial" pitchFamily="34" charset="-120"/>
-                        </a:rPr>
-                        <a:t>16,716</a:t>
+                        <a:t>18,310</a:t>
                       </a:r>
                       <a:endParaRPr lang="en-US" sz="1300" dirty="0">
                         <a:latin typeface="Arial" charset="0"/>
@@ -8568,6 +8436,138 @@
                   </a:tcPr>
                 </a:tc>
               </a:tr>
+              <a:tr h="512064">
+                <a:tc>
+                  <a:txBody>
+                    <a:bodyPr/>
+                    <a:lstStyle/>
+                    <a:p>
+                      <a:pPr algn="r" indent="0" marL="0">
+                        <a:buNone/>
+                      </a:pPr>
+                      <a:r>
+                        <a:rPr lang="en-US" sz="1300" dirty="0">
+                          <a:solidFill>
+                            <a:srgbClr val="16212E"/>
+                          </a:solidFill>
+                          <a:latin typeface="Arial" pitchFamily="34" charset="0"/>
+                          <a:ea typeface="Arial" pitchFamily="34" charset="-122"/>
+                          <a:cs typeface="Arial" pitchFamily="34" charset="-120"/>
+                        </a:rPr>
+                        <a:t>ארוך מ-100 ק"מ — לא סביר בעיר הזו</a:t>
+                      </a:r>
+                      <a:endParaRPr lang="en-US" sz="1300" dirty="0">
+                        <a:latin typeface="Arial" charset="0"/>
+                        <a:ea typeface="Arial" charset="0"/>
+                        <a:cs typeface="Arial" charset="0"/>
+                      </a:endParaRPr>
+                    </a:p>
+                  </a:txBody>
+                  <a:tcPr marL="91440" marR="91440" marT="45720" marB="45720">
+                    <a:lnL w="6350" cap="flat" cmpd="sng" algn="ctr">
+                      <a:solidFill>
+                        <a:srgbClr val="DCE3EC"/>
+                      </a:solidFill>
+                      <a:prstDash val="solid"/>
+                      <a:round/>
+                      <a:headEnd type="none" w="med" len="med"/>
+                      <a:tailEnd type="none" w="med" len="med"/>
+                    </a:lnL>
+                    <a:lnR w="6350" cap="flat" cmpd="sng" algn="ctr">
+                      <a:solidFill>
+                        <a:srgbClr val="DCE3EC"/>
+                      </a:solidFill>
+                      <a:prstDash val="solid"/>
+                      <a:round/>
+                      <a:headEnd type="none" w="med" len="med"/>
+                      <a:tailEnd type="none" w="med" len="med"/>
+                    </a:lnR>
+                    <a:lnT w="6350" cap="flat" cmpd="sng" algn="ctr">
+                      <a:solidFill>
+                        <a:srgbClr val="DCE3EC"/>
+                      </a:solidFill>
+                      <a:prstDash val="solid"/>
+                      <a:round/>
+                      <a:headEnd type="none" w="med" len="med"/>
+                      <a:tailEnd type="none" w="med" len="med"/>
+                    </a:lnT>
+                    <a:lnB w="6350" cap="flat" cmpd="sng" algn="ctr">
+                      <a:solidFill>
+                        <a:srgbClr val="DCE3EC"/>
+                      </a:solidFill>
+                      <a:prstDash val="solid"/>
+                      <a:round/>
+                      <a:headEnd type="none" w="med" len="med"/>
+                      <a:tailEnd type="none" w="med" len="med"/>
+                    </a:lnB>
+                  </a:tcPr>
+                </a:tc>
+                <a:tc>
+                  <a:txBody>
+                    <a:bodyPr/>
+                    <a:lstStyle/>
+                    <a:p>
+                      <a:pPr algn="ctr" indent="0" marL="0">
+                        <a:buNone/>
+                      </a:pPr>
+                      <a:r>
+                        <a:rPr lang="en-US" sz="1300" b="1" dirty="0">
+                          <a:solidFill>
+                            <a:srgbClr val="1C4E80"/>
+                          </a:solidFill>
+                          <a:latin typeface="Arial" pitchFamily="34" charset="0"/>
+                          <a:ea typeface="Arial" pitchFamily="34" charset="-122"/>
+                          <a:cs typeface="Arial" pitchFamily="34" charset="-120"/>
+                        </a:rPr>
+                        <a:t>647</a:t>
+                      </a:r>
+                      <a:endParaRPr lang="en-US" sz="1300" dirty="0">
+                        <a:latin typeface="Arial" charset="0"/>
+                        <a:ea typeface="Arial" charset="0"/>
+                        <a:cs typeface="Arial" charset="0"/>
+                      </a:endParaRPr>
+                    </a:p>
+                  </a:txBody>
+                  <a:tcPr marL="91440" marR="91440" marT="45720" marB="45720">
+                    <a:lnL w="6350" cap="flat" cmpd="sng" algn="ctr">
+                      <a:solidFill>
+                        <a:srgbClr val="DCE3EC"/>
+                      </a:solidFill>
+                      <a:prstDash val="solid"/>
+                      <a:round/>
+                      <a:headEnd type="none" w="med" len="med"/>
+                      <a:tailEnd type="none" w="med" len="med"/>
+                    </a:lnL>
+                    <a:lnR w="6350" cap="flat" cmpd="sng" algn="ctr">
+                      <a:solidFill>
+                        <a:srgbClr val="DCE3EC"/>
+                      </a:solidFill>
+                      <a:prstDash val="solid"/>
+                      <a:round/>
+                      <a:headEnd type="none" w="med" len="med"/>
+                      <a:tailEnd type="none" w="med" len="med"/>
+                    </a:lnR>
+                    <a:lnT w="6350" cap="flat" cmpd="sng" algn="ctr">
+                      <a:solidFill>
+                        <a:srgbClr val="DCE3EC"/>
+                      </a:solidFill>
+                      <a:prstDash val="solid"/>
+                      <a:round/>
+                      <a:headEnd type="none" w="med" len="med"/>
+                      <a:tailEnd type="none" w="med" len="med"/>
+                    </a:lnT>
+                    <a:lnB w="6350" cap="flat" cmpd="sng" algn="ctr">
+                      <a:solidFill>
+                        <a:srgbClr val="DCE3EC"/>
+                      </a:solidFill>
+                      <a:prstDash val="solid"/>
+                      <a:round/>
+                      <a:headEnd type="none" w="med" len="med"/>
+                      <a:tailEnd type="none" w="med" len="med"/>
+                    </a:lnB>
+                  </a:tcPr>
+                </a:tc>
+              </a:tr>
             </a:tbl>
           </a:graphicData>
         </a:graphic>
@@ -8632,7 +8632,7 @@
                 <a:ea typeface="Arial" pitchFamily="34" charset="-122"/>
                 <a:cs typeface="Arial" pitchFamily="34" charset="-120"/>
               </a:rPr>
-              <a:t>6.3%</a:t>
+              <a:t>5.5%</a:t>
             </a:r>
             <a:endParaRPr lang="en-US" sz="3400" dirty="0"/>
           </a:p>
@@ -8923,7 +8923,7 @@
                 <a:ea typeface="Arial" pitchFamily="34" charset="-122"/>
                 <a:cs typeface="Arial" pitchFamily="34" charset="-120"/>
               </a:rPr>
-              <a:t>חציון מרחק הנסיעה: 4.0 ק"מ   ·   אחוזון 99: 19.9 ק"מ   ·   תיבת הגבול נבדקת על כל נקודה, לא רק על הקצוות</a:t>
+              <a:t>חציון מרחק הנסיעה: 4.0 ק"מ   ·   אחוזון 99: 22.5 ק"מ   ·   תיבת הגבול נבדקת על כל נקודה, לא רק על הקצוות</a:t>
             </a:r>
             <a:endParaRPr lang="en-US" sz="1300" dirty="0"/>
           </a:p>
@@ -9495,7 +9495,7 @@
                           <a:ea typeface="Arial" pitchFamily="34" charset="-122"/>
                           <a:cs typeface="Arial" pitchFamily="34" charset="-120"/>
                         </a:rPr>
-                        <a:t>531</a:t>
+                        <a:t>5,560</a:t>
                       </a:r>
                       <a:endParaRPr lang="en-US" sz="1400" dirty="0">
                         <a:latin typeface="Arial" charset="0"/>
@@ -9769,7 +9769,7 @@
                           <a:ea typeface="Arial" pitchFamily="34" charset="-122"/>
                           <a:cs typeface="Arial" pitchFamily="34" charset="-120"/>
                         </a:rPr>
-                        <a:t>3,151</a:t>
+                        <a:t>20,592</a:t>
                       </a:r>
                       <a:endParaRPr lang="en-US" sz="1400" dirty="0">
                         <a:latin typeface="Arial" charset="0"/>
@@ -10043,7 +10043,7 @@
                           <a:ea typeface="Arial" pitchFamily="34" charset="-122"/>
                           <a:cs typeface="Arial" pitchFamily="34" charset="-120"/>
                         </a:rPr>
-                        <a:t>16,210</a:t>
+                        <a:t>63,872</a:t>
                       </a:r>
                       <a:endParaRPr lang="en-US" sz="1400" dirty="0">
                         <a:latin typeface="Arial" charset="0"/>
@@ -10463,7 +10463,7 @@
                 <a:ea typeface="Arial" pitchFamily="34" charset="-122"/>
                 <a:cs typeface="Arial" pitchFamily="34" charset="-120"/>
               </a:rPr>
-              <a:t>99.89%</a:t>
+              <a:t>99.87%</a:t>
             </a:r>
             <a:endParaRPr lang="en-US" sz="4400" dirty="0"/>
           </a:p>
@@ -10745,7 +10745,7 @@
                 <a:ea typeface="Arial" pitchFamily="34" charset="-122"/>
                 <a:cs typeface="Arial" pitchFamily="34" charset="-120"/>
               </a:rPr>
-              <a:t>29.5 KB בשידור לכל executor, 1.00% טעות חיובית, אפס טעות שלילית</a:t>
+              <a:t>34.2 KB בשידור לכל executor, 1.01% טעות חיובית, אפס טעות שלילית</a:t>
             </a:r>
             <a:endParaRPr lang="en-US" sz="1300" dirty="0"/>
           </a:p>
@@ -10784,7 +10784,7 @@
                 <a:ea typeface="Arial" pitchFamily="34" charset="-122"/>
                 <a:cs typeface="Arial" pitchFamily="34" charset="-120"/>
               </a:rPr>
-              <a:t>22,273,314 שברים נסרקו  →  25,214 עברו את הסקיצה  →  נספרו במדויק</a:t>
+              <a:t>23,354,267 שברים נסרקו  →  29,234 עברו את הסקיצה  →  נספרו במדויק</a:t>
             </a:r>
             <a:endParaRPr lang="en-US" sz="1500" dirty="0"/>
           </a:p>
@@ -11423,7 +11423,7 @@
                           <a:ea typeface="Arial" pitchFamily="34" charset="-122"/>
                           <a:cs typeface="Arial" pitchFamily="34" charset="-120"/>
                         </a:rPr>
-                        <a:t>1,322</a:t>
+                        <a:t>1,320</a:t>
                       </a:r>
                       <a:endParaRPr lang="en-US" sz="1350" dirty="0">
                         <a:latin typeface="Arial" charset="0"/>
@@ -11488,7 +11488,7 @@
                           <a:ea typeface="Arial" pitchFamily="34" charset="-122"/>
                           <a:cs typeface="Arial" pitchFamily="34" charset="-120"/>
                         </a:rPr>
-                        <a:t>5.7 ק"מ</a:t>
+                        <a:t>5.42 ק"מ</a:t>
                       </a:r>
                       <a:endParaRPr lang="en-US" sz="1350" dirty="0">
                         <a:latin typeface="Arial" charset="0"/>
@@ -11553,7 +11553,7 @@
                           <a:ea typeface="Arial" pitchFamily="34" charset="-122"/>
                           <a:cs typeface="Arial" pitchFamily="34" charset="-120"/>
                         </a:rPr>
-                        <a:t>4.14 ק"מ</a:t>
+                        <a:t>4.15 ק"מ</a:t>
                       </a:r>
                       <a:endParaRPr lang="en-US" sz="1350" dirty="0">
                         <a:latin typeface="Arial" charset="0"/>
@@ -11618,7 +11618,7 @@
                           <a:ea typeface="Arial" pitchFamily="34" charset="-122"/>
                           <a:cs typeface="Arial" pitchFamily="34" charset="-120"/>
                         </a:rPr>
-                        <a:t>12 דק'</a:t>
+                        <a:t>16 דק'</a:t>
                       </a:r>
                       <a:endParaRPr lang="en-US" sz="1350" dirty="0">
                         <a:latin typeface="Arial" charset="0"/>
@@ -11683,7 +11683,7 @@
                           <a:ea typeface="Arial" pitchFamily="34" charset="-122"/>
                           <a:cs typeface="Arial" pitchFamily="34" charset="-120"/>
                         </a:rPr>
-                        <a:t>168.4%</a:t>
+                        <a:t>172.68%</a:t>
                       </a:r>
                       <a:endParaRPr lang="en-US" sz="1350" dirty="0">
                         <a:latin typeface="Arial" charset="0"/>
@@ -11883,7 +11883,7 @@
                           <a:ea typeface="Arial" pitchFamily="34" charset="-122"/>
                           <a:cs typeface="Arial" pitchFamily="34" charset="-120"/>
                         </a:rPr>
-                        <a:t>12.78 ק"מ</a:t>
+                        <a:t>13.51 ק"מ</a:t>
                       </a:r>
                       <a:endParaRPr lang="en-US" sz="1350" dirty="0">
                         <a:latin typeface="Arial" charset="0"/>
@@ -11948,7 +11948,7 @@
                           <a:ea typeface="Arial" pitchFamily="34" charset="-122"/>
                           <a:cs typeface="Arial" pitchFamily="34" charset="-120"/>
                         </a:rPr>
-                        <a:t>10.35 ק"מ</a:t>
+                        <a:t>10.46 ק"מ</a:t>
                       </a:r>
                       <a:endParaRPr lang="en-US" sz="1350" dirty="0">
                         <a:latin typeface="Arial" charset="0"/>
@@ -12013,7 +12013,7 @@
                           <a:ea typeface="Arial" pitchFamily="34" charset="-122"/>
                           <a:cs typeface="Arial" pitchFamily="34" charset="-120"/>
                         </a:rPr>
-                        <a:t>6 דק'</a:t>
+                        <a:t>7 דק'</a:t>
                       </a:r>
                       <a:endParaRPr lang="en-US" sz="1350" dirty="0">
                         <a:latin typeface="Arial" charset="0"/>
@@ -12213,7 +12213,7 @@
                           <a:ea typeface="Arial" pitchFamily="34" charset="-122"/>
                           <a:cs typeface="Arial" pitchFamily="34" charset="-120"/>
                         </a:rPr>
-                        <a:t>118</a:t>
+                        <a:t>116</a:t>
                       </a:r>
                       <a:endParaRPr lang="en-US" sz="1350" dirty="0">
                         <a:latin typeface="Arial" charset="0"/>
@@ -12343,7 +12343,7 @@
                           <a:ea typeface="Arial" pitchFamily="34" charset="-122"/>
                           <a:cs typeface="Arial" pitchFamily="34" charset="-120"/>
                         </a:rPr>
-                        <a:t>7.76 ק"מ</a:t>
+                        <a:t>7.94 ק"מ</a:t>
                       </a:r>
                       <a:endParaRPr lang="en-US" sz="1350" dirty="0">
                         <a:latin typeface="Arial" charset="0"/>
@@ -12408,7 +12408,7 @@
                           <a:ea typeface="Arial" pitchFamily="34" charset="-122"/>
                           <a:cs typeface="Arial" pitchFamily="34" charset="-120"/>
                         </a:rPr>
-                        <a:t>35 דק'</a:t>
+                        <a:t>38 דק'</a:t>
                       </a:r>
                       <a:endParaRPr lang="en-US" sz="1350" dirty="0">
                         <a:latin typeface="Arial" charset="0"/>
@@ -12756,7 +12756,7 @@
                 <a:ea typeface="Arial" pitchFamily="34" charset="-122"/>
                 <a:cs typeface="Arial" pitchFamily="34" charset="-120"/>
               </a:rPr>
-              <a:t>אף שיטה לא נסמכת על ההערכה של עצמה. 2,784 מועמדים נמדדו מחדש מול 100% מהנסיעות — 23.37 שניות.</a:t>
+              <a:t>אף שיטה לא נסמכת על ההערכה של עצמה. 2,782 מועמדים נמדדו מחדש מול 100% מהנסיעות — 24.41 שניות.</a:t>
             </a:r>
             <a:endParaRPr lang="en-US" sz="1600" dirty="0"/>
           </a:p>
@@ -12822,7 +12822,7 @@
                 <a:ea typeface="Arial" pitchFamily="34" charset="-122"/>
                 <a:cs typeface="Arial" pitchFamily="34" charset="-120"/>
               </a:rPr>
-              <a:t>168.4%</a:t>
+              <a:t>172.68%</a:t>
             </a:r>
             <a:endParaRPr lang="en-US" sz="4400" dirty="0"/>
           </a:p>
@@ -13667,7 +13667,7 @@
                           <a:ea typeface="Arial" pitchFamily="34" charset="-122"/>
                           <a:cs typeface="Arial" pitchFamily="34" charset="-120"/>
                         </a:rPr>
-                        <a:t>103</a:t>
+                        <a:t>106</a:t>
                       </a:r>
                       <a:endParaRPr lang="en-US" sz="1400" dirty="0">
                         <a:latin typeface="Arial" charset="0"/>
@@ -13932,7 +13932,7 @@
                           <a:ea typeface="Arial" pitchFamily="34" charset="-122"/>
                           <a:cs typeface="Arial" pitchFamily="34" charset="-120"/>
                         </a:rPr>
-                        <a:t>103</a:t>
+                        <a:t>106</a:t>
                       </a:r>
                       <a:endParaRPr lang="en-US" sz="1400" dirty="0">
                         <a:latin typeface="Arial" charset="0"/>
@@ -14197,7 +14197,7 @@
                           <a:ea typeface="Arial" pitchFamily="34" charset="-122"/>
                           <a:cs typeface="Arial" pitchFamily="34" charset="-120"/>
                         </a:rPr>
-                        <a:t>491</a:t>
+                        <a:t>436</a:t>
                       </a:r>
                       <a:endParaRPr lang="en-US" sz="1400" dirty="0">
                         <a:latin typeface="Arial" charset="0"/>
@@ -14462,7 +14462,7 @@
                           <a:ea typeface="Arial" pitchFamily="34" charset="-122"/>
                           <a:cs typeface="Arial" pitchFamily="34" charset="-120"/>
                         </a:rPr>
-                        <a:t>347</a:t>
+                        <a:t>339</a:t>
                       </a:r>
                       <a:endParaRPr lang="en-US" sz="1400" dirty="0">
                         <a:latin typeface="Arial" charset="0"/>
